--- a/sonatype-nexus/proxy-repository/image/hands-on-sonatype-nexus_overview.pptx
+++ b/sonatype-nexus/proxy-repository/image/hands-on-sonatype-nexus_overview.pptx
@@ -4432,7 +4432,7 @@
                 <a:latin typeface="Meiryo UI" panose="020B0604030504040204" pitchFamily="50" charset="-128"/>
                 <a:ea typeface="Meiryo UI" panose="020B0604030504040204" pitchFamily="50" charset="-128"/>
               </a:rPr>
-              <a:t>Windows 10</a:t>
+              <a:t>Windows 11</a:t>
             </a:r>
             <a:endParaRPr kumimoji="1" lang="ja-JP" altLang="en-US" sz="1600" dirty="0">
               <a:solidFill>
@@ -4788,8 +4788,8 @@
         </p:nvSpPr>
         <p:spPr>
           <a:xfrm>
-            <a:off x="3778186" y="2729612"/>
-            <a:ext cx="900000" cy="324000"/>
+            <a:off x="5022000" y="2210988"/>
+            <a:ext cx="900000" cy="360000"/>
           </a:xfrm>
           <a:prstGeom prst="roundRect">
             <a:avLst>
@@ -4823,7 +4823,7 @@
           <a:p>
             <a:pPr algn="ctr"/>
             <a:r>
-              <a:rPr kumimoji="1" lang="en-US" altLang="ja-JP" sz="600" dirty="0">
+              <a:rPr kumimoji="1" lang="en-US" altLang="ja-JP" sz="700" dirty="0">
                 <a:solidFill>
                   <a:schemeClr val="tx1"/>
                 </a:solidFill>
@@ -4836,7 +4836,7 @@
           <a:p>
             <a:pPr algn="ctr"/>
             <a:r>
-              <a:rPr kumimoji="1" lang="en-US" altLang="ja-JP" sz="600" dirty="0">
+              <a:rPr kumimoji="1" lang="en-US" altLang="ja-JP" sz="700" dirty="0">
                 <a:solidFill>
                   <a:schemeClr val="tx1"/>
                 </a:solidFill>
@@ -4912,8 +4912,8 @@
         </p:blipFill>
         <p:spPr>
           <a:xfrm>
-            <a:off x="1269000" y="1608996"/>
-            <a:ext cx="396000" cy="396000"/>
+            <a:off x="1296000" y="1442546"/>
+            <a:ext cx="360000" cy="360000"/>
           </a:xfrm>
           <a:prstGeom prst="rect">
             <a:avLst/>
@@ -4938,8 +4938,8 @@
         </p:nvCxnSpPr>
         <p:spPr>
           <a:xfrm>
-            <a:off x="1665000" y="1806996"/>
-            <a:ext cx="2113186" cy="1084616"/>
+            <a:off x="1656000" y="1622546"/>
+            <a:ext cx="3366000" cy="768442"/>
           </a:xfrm>
           <a:prstGeom prst="straightConnector1">
             <a:avLst/>
@@ -4977,14 +4977,13 @@
           </p:cNvPr>
           <p:cNvCxnSpPr>
             <a:cxnSpLocks/>
-            <a:endCxn id="23" idx="1"/>
           </p:cNvCxnSpPr>
           <p:nvPr/>
         </p:nvCxnSpPr>
         <p:spPr>
-          <a:xfrm flipV="1">
-            <a:off x="1013322" y="1806996"/>
-            <a:ext cx="255678" cy="40"/>
+          <a:xfrm>
+            <a:off x="1006632" y="1622546"/>
+            <a:ext cx="289368" cy="0"/>
           </a:xfrm>
           <a:prstGeom prst="straightConnector1">
             <a:avLst/>
@@ -5025,7 +5024,7 @@
         </p:nvSpPr>
         <p:spPr>
           <a:xfrm>
-            <a:off x="1262617" y="2015594"/>
+            <a:off x="1262617" y="1823653"/>
             <a:ext cx="408766" cy="123111"/>
           </a:xfrm>
           <a:prstGeom prst="rect">
@@ -5092,8 +5091,8 @@
         </p:blipFill>
         <p:spPr>
           <a:xfrm>
-            <a:off x="1269000" y="2743112"/>
-            <a:ext cx="396000" cy="297000"/>
+            <a:off x="1296000" y="3056345"/>
+            <a:ext cx="360000" cy="270000"/>
           </a:xfrm>
           <a:prstGeom prst="rect">
             <a:avLst/>
@@ -5117,8 +5116,8 @@
         </p:nvCxnSpPr>
         <p:spPr>
           <a:xfrm>
-            <a:off x="1013322" y="2889329"/>
-            <a:ext cx="255678" cy="2283"/>
+            <a:off x="1006632" y="3191345"/>
+            <a:ext cx="289368" cy="0"/>
           </a:xfrm>
           <a:prstGeom prst="straightConnector1">
             <a:avLst/>
@@ -5159,7 +5158,7 @@
         </p:nvSpPr>
         <p:spPr>
           <a:xfrm>
-            <a:off x="1247389" y="3050999"/>
+            <a:off x="1247389" y="3352023"/>
             <a:ext cx="439223" cy="123111"/>
           </a:xfrm>
           <a:prstGeom prst="rect">
@@ -5216,8 +5215,8 @@
         </p:nvCxnSpPr>
         <p:spPr>
           <a:xfrm>
-            <a:off x="1665000" y="2891612"/>
-            <a:ext cx="441696" cy="0"/>
+            <a:off x="1656000" y="3191345"/>
+            <a:ext cx="450696" cy="0"/>
           </a:xfrm>
           <a:prstGeom prst="straightConnector1">
             <a:avLst/>
@@ -5302,8 +5301,8 @@
         </p:nvSpPr>
         <p:spPr>
           <a:xfrm>
-            <a:off x="2106696" y="2603612"/>
-            <a:ext cx="504000" cy="576000"/>
+            <a:off x="2106696" y="2957345"/>
+            <a:ext cx="576000" cy="468000"/>
           </a:xfrm>
           <a:prstGeom prst="flowChartMultidocument">
             <a:avLst/>
@@ -5339,7 +5338,7 @@
           <a:p>
             <a:pPr algn="ctr"/>
             <a:r>
-              <a:rPr kumimoji="1" lang="en-US" altLang="ja-JP" sz="600" dirty="0">
+              <a:rPr kumimoji="1" lang="en-US" altLang="ja-JP" sz="700" dirty="0">
                 <a:solidFill>
                   <a:schemeClr val="tx1"/>
                 </a:solidFill>
@@ -5352,7 +5351,7 @@
           <a:p>
             <a:pPr algn="ctr"/>
             <a:r>
-              <a:rPr kumimoji="1" lang="en-US" altLang="ja-JP" sz="600" dirty="0">
+              <a:rPr kumimoji="1" lang="en-US" altLang="ja-JP" sz="700" dirty="0">
                 <a:solidFill>
                   <a:schemeClr val="tx1"/>
                 </a:solidFill>
@@ -5361,7 +5360,7 @@
               </a:rPr>
               <a:t>Repository</a:t>
             </a:r>
-            <a:endParaRPr kumimoji="1" lang="ja-JP" altLang="en-US" sz="600" dirty="0">
+            <a:endParaRPr kumimoji="1" lang="ja-JP" altLang="en-US" sz="700" dirty="0">
               <a:solidFill>
                 <a:schemeClr val="tx1"/>
               </a:solidFill>
@@ -5371,52 +5370,6 @@
           </a:p>
         </p:txBody>
       </p:sp>
-      <p:cxnSp>
-        <p:nvCxnSpPr>
-          <p:cNvPr id="63" name="直線矢印コネクタ 62">
-            <a:extLst>
-              <a:ext uri="{FF2B5EF4-FFF2-40B4-BE49-F238E27FC236}">
-                <a16:creationId xmlns:a16="http://schemas.microsoft.com/office/drawing/2014/main" id="{4DA65618-E787-B863-7FD3-E96A93CEF0F3}"/>
-              </a:ext>
-            </a:extLst>
-          </p:cNvPr>
-          <p:cNvCxnSpPr>
-            <a:cxnSpLocks/>
-            <a:stCxn id="51" idx="3"/>
-            <a:endCxn id="9" idx="1"/>
-          </p:cNvCxnSpPr>
-          <p:nvPr/>
-        </p:nvCxnSpPr>
-        <p:spPr>
-          <a:xfrm>
-            <a:off x="2610696" y="2891612"/>
-            <a:ext cx="1167490" cy="0"/>
-          </a:xfrm>
-          <a:prstGeom prst="straightConnector1">
-            <a:avLst/>
-          </a:prstGeom>
-          <a:ln w="12700">
-            <a:solidFill>
-              <a:schemeClr val="tx1"/>
-            </a:solidFill>
-            <a:tailEnd type="arrow" w="med" len="sm"/>
-          </a:ln>
-        </p:spPr>
-        <p:style>
-          <a:lnRef idx="1">
-            <a:schemeClr val="accent1"/>
-          </a:lnRef>
-          <a:fillRef idx="0">
-            <a:schemeClr val="accent1"/>
-          </a:fillRef>
-          <a:effectRef idx="0">
-            <a:schemeClr val="accent1"/>
-          </a:effectRef>
-          <a:fontRef idx="minor">
-            <a:schemeClr val="tx1"/>
-          </a:fontRef>
-        </p:style>
-      </p:cxnSp>
       <p:sp>
         <p:nvSpPr>
           <p:cNvPr id="64" name="テキスト ボックス 63">
@@ -5431,7 +5384,7 @@
         </p:nvSpPr>
         <p:spPr>
           <a:xfrm>
-            <a:off x="2976534" y="2919523"/>
+            <a:off x="3768768" y="3043510"/>
             <a:ext cx="503343" cy="123111"/>
           </a:xfrm>
           <a:prstGeom prst="rect">
@@ -5484,8 +5437,8 @@
         </p:nvSpPr>
         <p:spPr>
           <a:xfrm>
-            <a:off x="5626996" y="2729612"/>
-            <a:ext cx="900000" cy="324000"/>
+            <a:off x="6501647" y="2210988"/>
+            <a:ext cx="900000" cy="360000"/>
           </a:xfrm>
           <a:prstGeom prst="roundRect">
             <a:avLst>
@@ -5519,7 +5472,7 @@
           <a:p>
             <a:pPr algn="ctr"/>
             <a:r>
-              <a:rPr kumimoji="1" lang="en-US" altLang="ja-JP" sz="600" dirty="0">
+              <a:rPr kumimoji="1" lang="en-US" altLang="ja-JP" sz="700" dirty="0">
                 <a:solidFill>
                   <a:schemeClr val="tx1"/>
                 </a:solidFill>
@@ -5532,7 +5485,7 @@
           <a:p>
             <a:pPr algn="ctr"/>
             <a:r>
-              <a:rPr kumimoji="1" lang="en-US" altLang="ja-JP" sz="600" dirty="0">
+              <a:rPr kumimoji="1" lang="en-US" altLang="ja-JP" sz="700" dirty="0">
                 <a:solidFill>
                   <a:schemeClr val="tx1"/>
                 </a:solidFill>
@@ -5572,7 +5525,7 @@
         </p:blipFill>
         <p:spPr>
           <a:xfrm>
-            <a:off x="3806586" y="2765612"/>
+            <a:off x="5061760" y="2264988"/>
             <a:ext cx="262308" cy="252000"/>
           </a:xfrm>
           <a:prstGeom prst="rect">
@@ -5598,8 +5551,8 @@
         </p:nvCxnSpPr>
         <p:spPr>
           <a:xfrm flipH="1">
-            <a:off x="4678186" y="2891612"/>
-            <a:ext cx="948810" cy="0"/>
+            <a:off x="5922000" y="2390988"/>
+            <a:ext cx="579647" cy="0"/>
           </a:xfrm>
           <a:prstGeom prst="straightConnector1">
             <a:avLst/>
@@ -5640,8 +5593,8 @@
         </p:nvSpPr>
         <p:spPr>
           <a:xfrm>
-            <a:off x="4702591" y="1644996"/>
-            <a:ext cx="900000" cy="324000"/>
+            <a:off x="4122000" y="1424546"/>
+            <a:ext cx="2700000" cy="396000"/>
           </a:xfrm>
           <a:prstGeom prst="roundRect">
             <a:avLst>
@@ -5670,12 +5623,12 @@
           </a:fontRef>
         </p:style>
         <p:txBody>
-          <a:bodyPr wrap="none" lIns="216000" tIns="0" rIns="0" bIns="0" rtlCol="0" anchor="ctr" anchorCtr="0"/>
+          <a:bodyPr wrap="none" lIns="216000" tIns="0" rIns="1548000" bIns="0" rtlCol="0" anchor="ctr" anchorCtr="0"/>
           <a:lstStyle/>
           <a:p>
             <a:pPr algn="ctr"/>
             <a:r>
-              <a:rPr kumimoji="1" lang="en-US" altLang="ja-JP" sz="600" dirty="0" err="1">
+              <a:rPr kumimoji="1" lang="en-US" altLang="ja-JP" sz="700" dirty="0" err="1">
                 <a:solidFill>
                   <a:schemeClr val="tx1"/>
                 </a:solidFill>
@@ -5685,7 +5638,7 @@
               <a:t>Sonatype</a:t>
             </a:r>
             <a:r>
-              <a:rPr kumimoji="1" lang="en-US" altLang="ja-JP" sz="600" dirty="0">
+              <a:rPr kumimoji="1" lang="en-US" altLang="ja-JP" sz="700" dirty="0">
                 <a:solidFill>
                   <a:schemeClr val="tx1"/>
                 </a:solidFill>
@@ -5698,7 +5651,7 @@
           <a:p>
             <a:pPr algn="ctr"/>
             <a:r>
-              <a:rPr kumimoji="1" lang="en-US" altLang="ja-JP" sz="600" dirty="0">
+              <a:rPr kumimoji="1" lang="en-US" altLang="ja-JP" sz="700" dirty="0">
                 <a:solidFill>
                   <a:schemeClr val="tx1"/>
                 </a:solidFill>
@@ -5732,7 +5685,7 @@
         </p:blipFill>
         <p:spPr>
           <a:xfrm>
-            <a:off x="4716467" y="1680996"/>
+            <a:off x="4163250" y="1496546"/>
             <a:ext cx="228000" cy="252000"/>
           </a:xfrm>
           <a:prstGeom prst="rect">
@@ -5740,52 +5693,6 @@
           </a:prstGeom>
         </p:spPr>
       </p:pic>
-      <p:cxnSp>
-        <p:nvCxnSpPr>
-          <p:cNvPr id="89" name="直線矢印コネクタ 88">
-            <a:extLst>
-              <a:ext uri="{FF2B5EF4-FFF2-40B4-BE49-F238E27FC236}">
-                <a16:creationId xmlns:a16="http://schemas.microsoft.com/office/drawing/2014/main" id="{0CD94DCA-403D-DAD6-B245-4CDB46E99375}"/>
-              </a:ext>
-            </a:extLst>
-          </p:cNvPr>
-          <p:cNvCxnSpPr>
-            <a:cxnSpLocks/>
-            <a:stCxn id="51" idx="3"/>
-            <a:endCxn id="55" idx="2"/>
-          </p:cNvCxnSpPr>
-          <p:nvPr/>
-        </p:nvCxnSpPr>
-        <p:spPr>
-          <a:xfrm flipV="1">
-            <a:off x="2610696" y="1968996"/>
-            <a:ext cx="2541895" cy="922616"/>
-          </a:xfrm>
-          <a:prstGeom prst="straightConnector1">
-            <a:avLst/>
-          </a:prstGeom>
-          <a:ln w="12700">
-            <a:solidFill>
-              <a:schemeClr val="tx1"/>
-            </a:solidFill>
-            <a:tailEnd type="arrow" w="med" len="sm"/>
-          </a:ln>
-        </p:spPr>
-        <p:style>
-          <a:lnRef idx="1">
-            <a:schemeClr val="accent1"/>
-          </a:lnRef>
-          <a:fillRef idx="0">
-            <a:schemeClr val="accent1"/>
-          </a:fillRef>
-          <a:effectRef idx="0">
-            <a:schemeClr val="accent1"/>
-          </a:effectRef>
-          <a:fontRef idx="minor">
-            <a:schemeClr val="tx1"/>
-          </a:fontRef>
-        </p:style>
-      </p:cxnSp>
       <p:cxnSp>
         <p:nvCxnSpPr>
           <p:cNvPr id="92" name="直線矢印コネクタ 91">
@@ -5798,60 +5705,14 @@
           <p:cNvCxnSpPr>
             <a:cxnSpLocks/>
             <a:stCxn id="23" idx="3"/>
-            <a:endCxn id="81" idx="1"/>
+            <a:endCxn id="55" idx="1"/>
           </p:cNvCxnSpPr>
           <p:nvPr/>
         </p:nvCxnSpPr>
         <p:spPr>
           <a:xfrm>
-            <a:off x="1665000" y="1806996"/>
-            <a:ext cx="3051467" cy="0"/>
-          </a:xfrm>
-          <a:prstGeom prst="straightConnector1">
-            <a:avLst/>
-          </a:prstGeom>
-          <a:ln w="12700">
-            <a:solidFill>
-              <a:schemeClr val="tx1"/>
-            </a:solidFill>
-            <a:tailEnd type="arrow" w="med" len="sm"/>
-          </a:ln>
-        </p:spPr>
-        <p:style>
-          <a:lnRef idx="1">
-            <a:schemeClr val="accent1"/>
-          </a:lnRef>
-          <a:fillRef idx="0">
-            <a:schemeClr val="accent1"/>
-          </a:fillRef>
-          <a:effectRef idx="0">
-            <a:schemeClr val="accent1"/>
-          </a:effectRef>
-          <a:fontRef idx="minor">
-            <a:schemeClr val="tx1"/>
-          </a:fontRef>
-        </p:style>
-      </p:cxnSp>
-      <p:cxnSp>
-        <p:nvCxnSpPr>
-          <p:cNvPr id="97" name="直線矢印コネクタ 96">
-            <a:extLst>
-              <a:ext uri="{FF2B5EF4-FFF2-40B4-BE49-F238E27FC236}">
-                <a16:creationId xmlns:a16="http://schemas.microsoft.com/office/drawing/2014/main" id="{35C119DC-6F64-C872-FD8A-E15C438C1EF4}"/>
-              </a:ext>
-            </a:extLst>
-          </p:cNvPr>
-          <p:cNvCxnSpPr>
-            <a:cxnSpLocks/>
-            <a:stCxn id="74" idx="0"/>
-            <a:endCxn id="55" idx="2"/>
-          </p:cNvCxnSpPr>
-          <p:nvPr/>
-        </p:nvCxnSpPr>
-        <p:spPr>
-          <a:xfrm flipH="1" flipV="1">
-            <a:off x="5152591" y="1968996"/>
-            <a:ext cx="924405" cy="760616"/>
+            <a:off x="1656000" y="1622546"/>
+            <a:ext cx="2466000" cy="0"/>
           </a:xfrm>
           <a:prstGeom prst="straightConnector1">
             <a:avLst/>
@@ -5906,7 +5767,7 @@
         </p:blipFill>
         <p:spPr>
           <a:xfrm>
-            <a:off x="5655396" y="2765612"/>
+            <a:off x="6541407" y="2264988"/>
             <a:ext cx="262308" cy="252000"/>
           </a:xfrm>
           <a:prstGeom prst="rect">
@@ -5928,7 +5789,7 @@
         </p:nvSpPr>
         <p:spPr>
           <a:xfrm>
-            <a:off x="3360932" y="497271"/>
+            <a:off x="3672000" y="497271"/>
             <a:ext cx="3600000" cy="540000"/>
           </a:xfrm>
           <a:prstGeom prst="ellipse">
@@ -5999,24 +5860,284 @@
       </p:sp>
       <p:cxnSp>
         <p:nvCxnSpPr>
-          <p:cNvPr id="105" name="直線矢印コネクタ 104">
+          <p:cNvPr id="2" name="直線矢印コネクタ 1">
             <a:extLst>
               <a:ext uri="{FF2B5EF4-FFF2-40B4-BE49-F238E27FC236}">
-                <a16:creationId xmlns:a16="http://schemas.microsoft.com/office/drawing/2014/main" id="{530C3625-CFCA-465A-5D97-864A0632A8B5}"/>
+                <a16:creationId xmlns:a16="http://schemas.microsoft.com/office/drawing/2014/main" id="{29275BA8-918E-78B0-628B-4C984AE9B2D9}"/>
               </a:ext>
             </a:extLst>
           </p:cNvPr>
           <p:cNvCxnSpPr>
             <a:cxnSpLocks/>
-            <a:stCxn id="55" idx="0"/>
-            <a:endCxn id="104" idx="4"/>
+          </p:cNvCxnSpPr>
+          <p:nvPr/>
+        </p:nvCxnSpPr>
+        <p:spPr>
+          <a:xfrm>
+            <a:off x="1152000" y="3638228"/>
+            <a:ext cx="648000" cy="0"/>
+          </a:xfrm>
+          <a:prstGeom prst="straightConnector1">
+            <a:avLst/>
+          </a:prstGeom>
+          <a:ln w="19050">
+            <a:solidFill>
+              <a:schemeClr val="tx1"/>
+            </a:solidFill>
+            <a:tailEnd type="arrow" w="med" len="sm"/>
+          </a:ln>
+        </p:spPr>
+        <p:style>
+          <a:lnRef idx="1">
+            <a:schemeClr val="accent1"/>
+          </a:lnRef>
+          <a:fillRef idx="0">
+            <a:schemeClr val="accent1"/>
+          </a:fillRef>
+          <a:effectRef idx="0">
+            <a:schemeClr val="accent1"/>
+          </a:effectRef>
+          <a:fontRef idx="minor">
+            <a:schemeClr val="tx1"/>
+          </a:fontRef>
+        </p:style>
+      </p:cxnSp>
+      <p:cxnSp>
+        <p:nvCxnSpPr>
+          <p:cNvPr id="12" name="コネクタ: カギ線 11">
+            <a:extLst>
+              <a:ext uri="{FF2B5EF4-FFF2-40B4-BE49-F238E27FC236}">
+                <a16:creationId xmlns:a16="http://schemas.microsoft.com/office/drawing/2014/main" id="{1F88F1E9-59F2-8062-5513-3E980EF82964}"/>
+              </a:ext>
+            </a:extLst>
+          </p:cNvPr>
+          <p:cNvCxnSpPr>
+            <a:cxnSpLocks/>
+            <a:stCxn id="51" idx="3"/>
+            <a:endCxn id="9" idx="2"/>
           </p:cNvCxnSpPr>
           <p:nvPr/>
         </p:nvCxnSpPr>
         <p:spPr>
           <a:xfrm flipV="1">
-            <a:off x="5152591" y="1037271"/>
-            <a:ext cx="8341" cy="607725"/>
+            <a:off x="2682696" y="2570988"/>
+            <a:ext cx="2789304" cy="620357"/>
+          </a:xfrm>
+          <a:prstGeom prst="bentConnector2">
+            <a:avLst/>
+          </a:prstGeom>
+          <a:ln w="12700">
+            <a:solidFill>
+              <a:schemeClr val="tx1"/>
+            </a:solidFill>
+            <a:tailEnd type="arrow" w="lg" len="sm"/>
+          </a:ln>
+        </p:spPr>
+        <p:style>
+          <a:lnRef idx="1">
+            <a:schemeClr val="accent1"/>
+          </a:lnRef>
+          <a:fillRef idx="0">
+            <a:schemeClr val="accent1"/>
+          </a:fillRef>
+          <a:effectRef idx="0">
+            <a:schemeClr val="accent1"/>
+          </a:effectRef>
+          <a:fontRef idx="minor">
+            <a:schemeClr val="tx1"/>
+          </a:fontRef>
+        </p:style>
+      </p:cxnSp>
+      <p:sp>
+        <p:nvSpPr>
+          <p:cNvPr id="17" name="円柱 16">
+            <a:extLst>
+              <a:ext uri="{FF2B5EF4-FFF2-40B4-BE49-F238E27FC236}">
+                <a16:creationId xmlns:a16="http://schemas.microsoft.com/office/drawing/2014/main" id="{01F62F04-251B-E7FB-481E-9C96F20C91F7}"/>
+              </a:ext>
+            </a:extLst>
+          </p:cNvPr>
+          <p:cNvSpPr/>
+          <p:nvPr/>
+        </p:nvSpPr>
+        <p:spPr>
+          <a:xfrm>
+            <a:off x="5220000" y="1460546"/>
+            <a:ext cx="504000" cy="324000"/>
+          </a:xfrm>
+          <a:prstGeom prst="can">
+            <a:avLst>
+              <a:gd name="adj" fmla="val 15534"/>
+            </a:avLst>
+          </a:prstGeom>
+          <a:solidFill>
+            <a:srgbClr val="FFFFCC"/>
+          </a:solidFill>
+          <a:ln w="12700">
+            <a:solidFill>
+              <a:schemeClr val="tx1"/>
+            </a:solidFill>
+          </a:ln>
+        </p:spPr>
+        <p:style>
+          <a:lnRef idx="2">
+            <a:schemeClr val="accent1">
+              <a:shade val="15000"/>
+            </a:schemeClr>
+          </a:lnRef>
+          <a:fillRef idx="1">
+            <a:schemeClr val="accent1"/>
+          </a:fillRef>
+          <a:effectRef idx="0">
+            <a:schemeClr val="accent1"/>
+          </a:effectRef>
+          <a:fontRef idx="minor">
+            <a:schemeClr val="lt1"/>
+          </a:fontRef>
+        </p:style>
+        <p:txBody>
+          <a:bodyPr wrap="none" rtlCol="0" anchor="ctr"/>
+          <a:lstStyle/>
+          <a:p>
+            <a:pPr algn="ctr"/>
+            <a:r>
+              <a:rPr kumimoji="1" lang="en-US" altLang="ja-JP" sz="700" dirty="0">
+                <a:solidFill>
+                  <a:schemeClr val="tx1"/>
+                </a:solidFill>
+                <a:latin typeface="メイリオ" panose="020B0604030504040204" pitchFamily="50" charset="-128"/>
+                <a:ea typeface="メイリオ" panose="020B0604030504040204" pitchFamily="50" charset="-128"/>
+              </a:rPr>
+              <a:t>Proxy</a:t>
+            </a:r>
+          </a:p>
+          <a:p>
+            <a:pPr algn="ctr"/>
+            <a:r>
+              <a:rPr kumimoji="1" lang="en-US" altLang="ja-JP" sz="700" dirty="0">
+                <a:solidFill>
+                  <a:schemeClr val="tx1"/>
+                </a:solidFill>
+                <a:latin typeface="メイリオ" panose="020B0604030504040204" pitchFamily="50" charset="-128"/>
+                <a:ea typeface="メイリオ" panose="020B0604030504040204" pitchFamily="50" charset="-128"/>
+              </a:rPr>
+              <a:t>Repository</a:t>
+            </a:r>
+            <a:endParaRPr kumimoji="1" lang="ja-JP" altLang="en-US" sz="700" dirty="0">
+              <a:solidFill>
+                <a:schemeClr val="tx1"/>
+              </a:solidFill>
+              <a:latin typeface="メイリオ" panose="020B0604030504040204" pitchFamily="50" charset="-128"/>
+              <a:ea typeface="メイリオ" panose="020B0604030504040204" pitchFamily="50" charset="-128"/>
+            </a:endParaRPr>
+          </a:p>
+        </p:txBody>
+      </p:sp>
+      <p:sp>
+        <p:nvSpPr>
+          <p:cNvPr id="21" name="円柱 20">
+            <a:extLst>
+              <a:ext uri="{FF2B5EF4-FFF2-40B4-BE49-F238E27FC236}">
+                <a16:creationId xmlns:a16="http://schemas.microsoft.com/office/drawing/2014/main" id="{3A12C559-4B70-A22D-CD37-B1C75F0A8FA8}"/>
+              </a:ext>
+            </a:extLst>
+          </p:cNvPr>
+          <p:cNvSpPr/>
+          <p:nvPr/>
+        </p:nvSpPr>
+        <p:spPr>
+          <a:xfrm>
+            <a:off x="6029946" y="1460546"/>
+            <a:ext cx="504000" cy="324000"/>
+          </a:xfrm>
+          <a:prstGeom prst="can">
+            <a:avLst>
+              <a:gd name="adj" fmla="val 15534"/>
+            </a:avLst>
+          </a:prstGeom>
+          <a:solidFill>
+            <a:srgbClr val="FFFFCC"/>
+          </a:solidFill>
+          <a:ln w="12700">
+            <a:solidFill>
+              <a:schemeClr val="tx1"/>
+            </a:solidFill>
+          </a:ln>
+        </p:spPr>
+        <p:style>
+          <a:lnRef idx="2">
+            <a:schemeClr val="accent1">
+              <a:shade val="15000"/>
+            </a:schemeClr>
+          </a:lnRef>
+          <a:fillRef idx="1">
+            <a:schemeClr val="accent1"/>
+          </a:fillRef>
+          <a:effectRef idx="0">
+            <a:schemeClr val="accent1"/>
+          </a:effectRef>
+          <a:fontRef idx="minor">
+            <a:schemeClr val="lt1"/>
+          </a:fontRef>
+        </p:style>
+        <p:txBody>
+          <a:bodyPr wrap="none" rtlCol="0" anchor="ctr"/>
+          <a:lstStyle/>
+          <a:p>
+            <a:pPr algn="ctr"/>
+            <a:r>
+              <a:rPr kumimoji="1" lang="en-US" altLang="ja-JP" sz="700" dirty="0">
+                <a:solidFill>
+                  <a:schemeClr val="tx1"/>
+                </a:solidFill>
+                <a:latin typeface="メイリオ" panose="020B0604030504040204" pitchFamily="50" charset="-128"/>
+                <a:ea typeface="メイリオ" panose="020B0604030504040204" pitchFamily="50" charset="-128"/>
+              </a:rPr>
+              <a:t>Hosted</a:t>
+            </a:r>
+          </a:p>
+          <a:p>
+            <a:pPr algn="ctr"/>
+            <a:r>
+              <a:rPr kumimoji="1" lang="en-US" altLang="ja-JP" sz="700" dirty="0">
+                <a:solidFill>
+                  <a:schemeClr val="tx1"/>
+                </a:solidFill>
+                <a:latin typeface="メイリオ" panose="020B0604030504040204" pitchFamily="50" charset="-128"/>
+                <a:ea typeface="メイリオ" panose="020B0604030504040204" pitchFamily="50" charset="-128"/>
+              </a:rPr>
+              <a:t>Repository</a:t>
+            </a:r>
+            <a:endParaRPr kumimoji="1" lang="ja-JP" altLang="en-US" sz="700" dirty="0">
+              <a:solidFill>
+                <a:schemeClr val="tx1"/>
+              </a:solidFill>
+              <a:latin typeface="メイリオ" panose="020B0604030504040204" pitchFamily="50" charset="-128"/>
+              <a:ea typeface="メイリオ" panose="020B0604030504040204" pitchFamily="50" charset="-128"/>
+            </a:endParaRPr>
+          </a:p>
+        </p:txBody>
+      </p:sp>
+      <p:cxnSp>
+        <p:nvCxnSpPr>
+          <p:cNvPr id="89" name="直線矢印コネクタ 88">
+            <a:extLst>
+              <a:ext uri="{FF2B5EF4-FFF2-40B4-BE49-F238E27FC236}">
+                <a16:creationId xmlns:a16="http://schemas.microsoft.com/office/drawing/2014/main" id="{0CD94DCA-403D-DAD6-B245-4CDB46E99375}"/>
+              </a:ext>
+            </a:extLst>
+          </p:cNvPr>
+          <p:cNvCxnSpPr>
+            <a:cxnSpLocks/>
+            <a:stCxn id="51" idx="3"/>
+            <a:endCxn id="17" idx="3"/>
+          </p:cNvCxnSpPr>
+          <p:nvPr/>
+        </p:nvCxnSpPr>
+        <p:spPr>
+          <a:xfrm flipV="1">
+            <a:off x="2682696" y="1784546"/>
+            <a:ext cx="2789304" cy="1406799"/>
           </a:xfrm>
           <a:prstGeom prst="straightConnector1">
             <a:avLst/>
@@ -6043,6 +6164,303 @@
           </a:fontRef>
         </p:style>
       </p:cxnSp>
+      <p:cxnSp>
+        <p:nvCxnSpPr>
+          <p:cNvPr id="97" name="直線矢印コネクタ 96">
+            <a:extLst>
+              <a:ext uri="{FF2B5EF4-FFF2-40B4-BE49-F238E27FC236}">
+                <a16:creationId xmlns:a16="http://schemas.microsoft.com/office/drawing/2014/main" id="{35C119DC-6F64-C872-FD8A-E15C438C1EF4}"/>
+              </a:ext>
+            </a:extLst>
+          </p:cNvPr>
+          <p:cNvCxnSpPr>
+            <a:cxnSpLocks/>
+            <a:stCxn id="74" idx="0"/>
+            <a:endCxn id="21" idx="3"/>
+          </p:cNvCxnSpPr>
+          <p:nvPr/>
+        </p:nvCxnSpPr>
+        <p:spPr>
+          <a:xfrm flipH="1" flipV="1">
+            <a:off x="6281946" y="1784546"/>
+            <a:ext cx="669701" cy="426442"/>
+          </a:xfrm>
+          <a:prstGeom prst="straightConnector1">
+            <a:avLst/>
+          </a:prstGeom>
+          <a:ln w="12700">
+            <a:solidFill>
+              <a:schemeClr val="tx1"/>
+            </a:solidFill>
+            <a:tailEnd type="arrow" w="med" len="sm"/>
+          </a:ln>
+        </p:spPr>
+        <p:style>
+          <a:lnRef idx="1">
+            <a:schemeClr val="accent1"/>
+          </a:lnRef>
+          <a:fillRef idx="0">
+            <a:schemeClr val="accent1"/>
+          </a:fillRef>
+          <a:effectRef idx="0">
+            <a:schemeClr val="accent1"/>
+          </a:effectRef>
+          <a:fontRef idx="minor">
+            <a:schemeClr val="tx1"/>
+          </a:fontRef>
+        </p:style>
+      </p:cxnSp>
+      <p:cxnSp>
+        <p:nvCxnSpPr>
+          <p:cNvPr id="34" name="直線矢印コネクタ 33">
+            <a:extLst>
+              <a:ext uri="{FF2B5EF4-FFF2-40B4-BE49-F238E27FC236}">
+                <a16:creationId xmlns:a16="http://schemas.microsoft.com/office/drawing/2014/main" id="{AEC0FDAC-1C55-2792-FF72-39284C69C736}"/>
+              </a:ext>
+            </a:extLst>
+          </p:cNvPr>
+          <p:cNvCxnSpPr>
+            <a:cxnSpLocks/>
+            <a:stCxn id="74" idx="0"/>
+            <a:endCxn id="17" idx="3"/>
+          </p:cNvCxnSpPr>
+          <p:nvPr/>
+        </p:nvCxnSpPr>
+        <p:spPr>
+          <a:xfrm flipH="1" flipV="1">
+            <a:off x="5472000" y="1784546"/>
+            <a:ext cx="1479647" cy="426442"/>
+          </a:xfrm>
+          <a:prstGeom prst="straightConnector1">
+            <a:avLst/>
+          </a:prstGeom>
+          <a:ln w="12700">
+            <a:solidFill>
+              <a:schemeClr val="tx1"/>
+            </a:solidFill>
+            <a:tailEnd type="arrow" w="med" len="sm"/>
+          </a:ln>
+        </p:spPr>
+        <p:style>
+          <a:lnRef idx="1">
+            <a:schemeClr val="accent1"/>
+          </a:lnRef>
+          <a:fillRef idx="0">
+            <a:schemeClr val="accent1"/>
+          </a:fillRef>
+          <a:effectRef idx="0">
+            <a:schemeClr val="accent1"/>
+          </a:effectRef>
+          <a:fontRef idx="minor">
+            <a:schemeClr val="tx1"/>
+          </a:fontRef>
+        </p:style>
+      </p:cxnSp>
+      <p:cxnSp>
+        <p:nvCxnSpPr>
+          <p:cNvPr id="105" name="直線矢印コネクタ 104">
+            <a:extLst>
+              <a:ext uri="{FF2B5EF4-FFF2-40B4-BE49-F238E27FC236}">
+                <a16:creationId xmlns:a16="http://schemas.microsoft.com/office/drawing/2014/main" id="{530C3625-CFCA-465A-5D97-864A0632A8B5}"/>
+              </a:ext>
+            </a:extLst>
+          </p:cNvPr>
+          <p:cNvCxnSpPr>
+            <a:cxnSpLocks/>
+            <a:stCxn id="17" idx="0"/>
+            <a:endCxn id="104" idx="4"/>
+          </p:cNvCxnSpPr>
+          <p:nvPr/>
+        </p:nvCxnSpPr>
+        <p:spPr>
+          <a:xfrm flipV="1">
+            <a:off x="5472000" y="1037271"/>
+            <a:ext cx="0" cy="473605"/>
+          </a:xfrm>
+          <a:prstGeom prst="straightConnector1">
+            <a:avLst/>
+          </a:prstGeom>
+          <a:ln w="12700">
+            <a:solidFill>
+              <a:schemeClr val="tx1"/>
+            </a:solidFill>
+            <a:tailEnd type="arrow" w="med" len="sm"/>
+          </a:ln>
+        </p:spPr>
+        <p:style>
+          <a:lnRef idx="1">
+            <a:schemeClr val="accent1"/>
+          </a:lnRef>
+          <a:fillRef idx="0">
+            <a:schemeClr val="accent1"/>
+          </a:fillRef>
+          <a:effectRef idx="0">
+            <a:schemeClr val="accent1"/>
+          </a:effectRef>
+          <a:fontRef idx="minor">
+            <a:schemeClr val="tx1"/>
+          </a:fontRef>
+        </p:style>
+      </p:cxnSp>
+      <p:sp>
+        <p:nvSpPr>
+          <p:cNvPr id="48" name="テキスト ボックス 47">
+            <a:extLst>
+              <a:ext uri="{FF2B5EF4-FFF2-40B4-BE49-F238E27FC236}">
+                <a16:creationId xmlns:a16="http://schemas.microsoft.com/office/drawing/2014/main" id="{8565FE39-08C1-97CC-0227-D02EB327E102}"/>
+              </a:ext>
+            </a:extLst>
+          </p:cNvPr>
+          <p:cNvSpPr txBox="1"/>
+          <p:nvPr/>
+        </p:nvSpPr>
+        <p:spPr>
+          <a:xfrm>
+            <a:off x="3030008" y="2570558"/>
+            <a:ext cx="637995" cy="123111"/>
+          </a:xfrm>
+          <a:prstGeom prst="rect">
+            <a:avLst/>
+          </a:prstGeom>
+          <a:noFill/>
+        </p:spPr>
+        <p:txBody>
+          <a:bodyPr wrap="none" lIns="0" tIns="0" rIns="0" bIns="0" rtlCol="0">
+            <a:spAutoFit/>
+          </a:bodyPr>
+          <a:lstStyle/>
+          <a:p>
+            <a:pPr algn="ctr"/>
+            <a:r>
+              <a:rPr kumimoji="1" lang="en-US" altLang="ja-JP" sz="800" dirty="0">
+                <a:effectLst>
+                  <a:glow rad="63500">
+                    <a:schemeClr val="bg1"/>
+                  </a:glow>
+                </a:effectLst>
+                <a:latin typeface="Meiryo UI" panose="020B0604030504040204" pitchFamily="50" charset="-128"/>
+                <a:ea typeface="Meiryo UI" panose="020B0604030504040204" pitchFamily="50" charset="-128"/>
+              </a:rPr>
+              <a:t>Build at local</a:t>
+            </a:r>
+            <a:endParaRPr kumimoji="1" lang="ja-JP" altLang="en-US" sz="800" dirty="0">
+              <a:effectLst>
+                <a:glow rad="63500">
+                  <a:schemeClr val="bg1"/>
+                </a:glow>
+              </a:effectLst>
+              <a:latin typeface="Meiryo UI" panose="020B0604030504040204" pitchFamily="50" charset="-128"/>
+              <a:ea typeface="Meiryo UI" panose="020B0604030504040204" pitchFamily="50" charset="-128"/>
+            </a:endParaRPr>
+          </a:p>
+        </p:txBody>
+      </p:sp>
+      <p:sp>
+        <p:nvSpPr>
+          <p:cNvPr id="57" name="テキスト ボックス 56">
+            <a:extLst>
+              <a:ext uri="{FF2B5EF4-FFF2-40B4-BE49-F238E27FC236}">
+                <a16:creationId xmlns:a16="http://schemas.microsoft.com/office/drawing/2014/main" id="{A3B9E2D2-B10A-20B1-B319-B35F5B11E1B9}"/>
+              </a:ext>
+            </a:extLst>
+          </p:cNvPr>
+          <p:cNvSpPr txBox="1"/>
+          <p:nvPr/>
+        </p:nvSpPr>
+        <p:spPr>
+          <a:xfrm>
+            <a:off x="5473844" y="1991808"/>
+            <a:ext cx="743793" cy="123111"/>
+          </a:xfrm>
+          <a:prstGeom prst="rect">
+            <a:avLst/>
+          </a:prstGeom>
+          <a:noFill/>
+        </p:spPr>
+        <p:txBody>
+          <a:bodyPr wrap="none" lIns="0" tIns="0" rIns="0" bIns="0" rtlCol="0">
+            <a:spAutoFit/>
+          </a:bodyPr>
+          <a:lstStyle/>
+          <a:p>
+            <a:pPr algn="ctr"/>
+            <a:r>
+              <a:rPr kumimoji="1" lang="en-US" altLang="ja-JP" sz="800" dirty="0">
+                <a:effectLst>
+                  <a:glow rad="63500">
+                    <a:schemeClr val="bg1"/>
+                  </a:glow>
+                </a:effectLst>
+                <a:latin typeface="Meiryo UI" panose="020B0604030504040204" pitchFamily="50" charset="-128"/>
+                <a:ea typeface="Meiryo UI" panose="020B0604030504040204" pitchFamily="50" charset="-128"/>
+              </a:rPr>
+              <a:t>Build at CI/CD</a:t>
+            </a:r>
+            <a:endParaRPr kumimoji="1" lang="ja-JP" altLang="en-US" sz="800" dirty="0">
+              <a:effectLst>
+                <a:glow rad="63500">
+                  <a:schemeClr val="bg1"/>
+                </a:glow>
+              </a:effectLst>
+              <a:latin typeface="Meiryo UI" panose="020B0604030504040204" pitchFamily="50" charset="-128"/>
+              <a:ea typeface="Meiryo UI" panose="020B0604030504040204" pitchFamily="50" charset="-128"/>
+            </a:endParaRPr>
+          </a:p>
+        </p:txBody>
+      </p:sp>
+      <p:sp>
+        <p:nvSpPr>
+          <p:cNvPr id="61" name="テキスト ボックス 60">
+            <a:extLst>
+              <a:ext uri="{FF2B5EF4-FFF2-40B4-BE49-F238E27FC236}">
+                <a16:creationId xmlns:a16="http://schemas.microsoft.com/office/drawing/2014/main" id="{6139AA7F-1E95-A7D8-09AC-894473A429AC}"/>
+              </a:ext>
+            </a:extLst>
+          </p:cNvPr>
+          <p:cNvSpPr txBox="1"/>
+          <p:nvPr/>
+        </p:nvSpPr>
+        <p:spPr>
+          <a:xfrm>
+            <a:off x="6799680" y="1991808"/>
+            <a:ext cx="825547" cy="123111"/>
+          </a:xfrm>
+          <a:prstGeom prst="rect">
+            <a:avLst/>
+          </a:prstGeom>
+          <a:noFill/>
+        </p:spPr>
+        <p:txBody>
+          <a:bodyPr wrap="none" lIns="0" tIns="0" rIns="0" bIns="0" rtlCol="0">
+            <a:spAutoFit/>
+          </a:bodyPr>
+          <a:lstStyle/>
+          <a:p>
+            <a:pPr algn="ctr"/>
+            <a:r>
+              <a:rPr kumimoji="1" lang="en-US" altLang="ja-JP" sz="800" dirty="0">
+                <a:effectLst>
+                  <a:glow rad="63500">
+                    <a:schemeClr val="bg1"/>
+                  </a:glow>
+                </a:effectLst>
+                <a:latin typeface="Meiryo UI" panose="020B0604030504040204" pitchFamily="50" charset="-128"/>
+                <a:ea typeface="Meiryo UI" panose="020B0604030504040204" pitchFamily="50" charset="-128"/>
+              </a:rPr>
+              <a:t>Publish at CI/CD</a:t>
+            </a:r>
+            <a:endParaRPr kumimoji="1" lang="ja-JP" altLang="en-US" sz="800" dirty="0">
+              <a:effectLst>
+                <a:glow rad="63500">
+                  <a:schemeClr val="bg1"/>
+                </a:glow>
+              </a:effectLst>
+              <a:latin typeface="Meiryo UI" panose="020B0604030504040204" pitchFamily="50" charset="-128"/>
+              <a:ea typeface="Meiryo UI" panose="020B0604030504040204" pitchFamily="50" charset="-128"/>
+            </a:endParaRPr>
+          </a:p>
+        </p:txBody>
+      </p:sp>
     </p:spTree>
     <p:extLst>
       <p:ext uri="{BB962C8B-B14F-4D97-AF65-F5344CB8AC3E}">
